--- a/curso/pptx/S27.pptx
+++ b/curso/pptx/S27.pptx
@@ -7015,7 +7015,7 @@
                 </a:solidFill>
                 <a:latin typeface="Nunito Sans"/>
               </a:rPr>
-              <a:t>Recuerda: una </a:t>
+              <a:t>记住：</a:t>
             </a:r>
             <a:r>
               <a:rPr sz="2800" b="1">
@@ -7024,7 +7024,7 @@
                 </a:solidFill>
                 <a:latin typeface="Nunito Sans"/>
               </a:rPr>
-              <a:t>falacia</a:t>
+              <a:t>谬误</a:t>
             </a:r>
             <a:r>
               <a:rPr sz="2800" b="0">
@@ -7033,7 +7033,7 @@
                 </a:solidFill>
                 <a:latin typeface="Nunito Sans"/>
               </a:rPr>
-              <a:t> parece un buen argumento y no lo es</a:t>
+              <a:t>看起来像一个好论证，其实不是</a:t>
             </a:r>
           </a:p>
           <a:p>
@@ -7058,7 +7058,7 @@
                 </a:solidFill>
                 <a:latin typeface="Nunito Sans"/>
               </a:rPr>
-              <a:t>Fiarse de un experto </a:t>
+              <a:t>相信一个</a:t>
             </a:r>
             <a:r>
               <a:rPr sz="2800" b="1">
@@ -7067,7 +7067,7 @@
                 </a:solidFill>
                 <a:latin typeface="Nunito Sans"/>
               </a:rPr>
-              <a:t>de verdad</a:t>
+              <a:t>真正的</a:t>
             </a:r>
             <a:r>
               <a:rPr sz="2800" b="0">
@@ -7076,7 +7076,7 @@
                 </a:solidFill>
                 <a:latin typeface="Nunito Sans"/>
               </a:rPr>
-              <a:t>, en su campo, no es falacia</a:t>
+              <a:t>专家，在他的领域里，不是谬误</a:t>
             </a:r>
           </a:p>
           <a:p>
@@ -7101,7 +7101,7 @@
                 </a:solidFill>
                 <a:latin typeface="Nunito Sans"/>
               </a:rPr>
-              <a:t>El fallo es fiarse </a:t>
+              <a:t>错误在于</a:t>
             </a:r>
             <a:r>
               <a:rPr sz="2800" b="1">
@@ -7110,7 +7110,7 @@
                 </a:solidFill>
                 <a:latin typeface="Nunito Sans"/>
               </a:rPr>
-              <a:t>不看笔记</a:t>
+              <a:t>不看</a:t>
             </a:r>
             <a:r>
               <a:rPr sz="2800" b="0">
@@ -7119,7 +7119,7 @@
                 </a:solidFill>
                 <a:latin typeface="Nunito Sans"/>
               </a:rPr>
-              <a:t> las cuatro preguntas</a:t>
+              <a:t>四个问题就相信</a:t>
             </a:r>
           </a:p>
         </p:txBody>
@@ -7271,7 +7271,7 @@
                 </a:solidFill>
                 <a:latin typeface="Nunito Sans"/>
               </a:rPr>
-              <a:t>El famoso:</a:t>
+              <a:t>名人：</a:t>
             </a:r>
             <a:r>
               <a:rPr sz="2800" b="0">
@@ -7280,7 +7280,7 @@
                 </a:solidFill>
                 <a:latin typeface="Nunito Sans"/>
               </a:rPr>
-              <a:t> un deportista o un influencer que opina de salud</a:t>
+              <a:t>运动员或者网红对健康发表看法</a:t>
             </a:r>
           </a:p>
           <a:p>
@@ -7305,7 +7305,7 @@
                 </a:solidFill>
                 <a:latin typeface="Nunito Sans"/>
               </a:rPr>
-              <a:t>La bata blanca:</a:t>
+              <a:t>白大褂：</a:t>
             </a:r>
             <a:r>
               <a:rPr sz="2800" b="0">
@@ -7314,7 +7314,7 @@
                 </a:solidFill>
                 <a:latin typeface="Nunito Sans"/>
               </a:rPr>
-              <a:t> alguien vestido de médico o de científico</a:t>
+              <a:t>穿得像医生或者科学家的人</a:t>
             </a:r>
           </a:p>
           <a:p>
@@ -7339,7 +7339,7 @@
                 </a:solidFill>
                 <a:latin typeface="Nunito Sans"/>
               </a:rPr>
-              <a:t>«Los expertos dicen»:</a:t>
+              <a:t>“专家说”：</a:t>
             </a:r>
             <a:r>
               <a:rPr sz="2800" b="0">
@@ -7348,7 +7348,7 @@
                 </a:solidFill>
                 <a:latin typeface="Nunito Sans"/>
               </a:rPr>
-              <a:t> expertos sin nombre y sin pruebas</a:t>
+              <a:t>没有名字、没有证据的专家</a:t>
             </a:r>
           </a:p>
         </p:txBody>
@@ -7582,7 +7582,7 @@
                 </a:solidFill>
                 <a:latin typeface="Nunito Sans"/>
               </a:rPr>
-              <a:t>«Lo dice un futbolista, así que es sano»</a:t>
+              <a:t>“足球运动员说的，所以是健康的”</a:t>
             </a:r>
           </a:p>
           <a:p>
@@ -7607,7 +7607,7 @@
                 </a:solidFill>
                 <a:latin typeface="Nunito Sans"/>
               </a:rPr>
-              <a:t>«Un actor con bata lo recomienda»</a:t>
+              <a:t>“一个穿白大褂的演员推荐”</a:t>
             </a:r>
           </a:p>
           <a:p>
@@ -7632,7 +7632,7 @@
                 </a:solidFill>
                 <a:latin typeface="Nunito Sans"/>
               </a:rPr>
-              <a:t>«Los expertos dicen…» (¿quiénes?)</a:t>
+              <a:t>“专家说……”（是谁？）</a:t>
             </a:r>
           </a:p>
         </p:txBody>
@@ -7762,7 +7762,7 @@
                 </a:solidFill>
                 <a:latin typeface="Nunito Sans"/>
               </a:rPr>
-              <a:t>«Lo dice mi médica, que me ha examinado»</a:t>
+              <a:t>“我的医生说的，她给我检查过”</a:t>
             </a:r>
           </a:p>
           <a:p>
@@ -7787,7 +7787,7 @@
                 </a:solidFill>
                 <a:latin typeface="Nunito Sans"/>
               </a:rPr>
-              <a:t>«Lo dicen casi todos los expertos del tema»</a:t>
+              <a:t>“这个话题的几乎所有专家都这么说”</a:t>
             </a:r>
           </a:p>
           <a:p>
@@ -7812,7 +7812,7 @@
                 </a:solidFill>
                 <a:latin typeface="Nunito Sans"/>
               </a:rPr>
-              <a:t>«El estudio explica cómo lo midió»</a:t>
+              <a:t>“这项研究解释了它是怎么测量的”</a:t>
             </a:r>
           </a:p>
         </p:txBody>

--- a/curso/pptx/S27.pptx
+++ b/curso/pptx/S27.pptx
@@ -4128,7 +4128,7 @@
                 </a:solidFill>
                 <a:latin typeface="Nunito Sans"/>
               </a:rPr>
-              <a:t>Kevin 关注了一位有两百万粉丝的游戏主播。这位主播说某种维生素软糖“让你更聪明”。</a:t>
+              <a:t>一个男孩关注了一位有两百万粉丝的游戏主播。这位主播说某种维生素软糖“让你更聪明”。</a:t>
             </a:r>
           </a:p>
         </p:txBody>
@@ -5055,7 +5055,7 @@
                 </a:solidFill>
                 <a:latin typeface="Nunito Sans"/>
               </a:rPr>
-              <a:t>一段卫生部门的视频：一位穿白大褂的医生讲解怎样把手洗干净。Omar：“白大褂的花招。是谬误。”</a:t>
+              <a:t>一段卫生部门的视频：一位穿白大褂的医生讲解怎样把手洗干净。一个男孩：“白大褂的花招。是谬误。”</a:t>
             </a:r>
           </a:p>
         </p:txBody>
